--- a/Lessons/09_neural_networks/Slides/neural_networks_slides.pptx
+++ b/Lessons/09_neural_networks/Slides/neural_networks_slides.pptx
@@ -699,7 +699,7 @@
             </a:pPr>
             <a:r>
               <a:rPr/>
-              <a:t>For a standard two-dimensional normal the probability of landing inside a circle of radius s is one minus e to the minus s squared over two — a fact worth a moment, since it is the same integral that reappears in section 11 when the lesson computes how well a polygon of a given number of sides could fence this region.</a:t>
+              <a:t>For a standard two-dimensional normal the probability of landing inside a circle of radius s is one minus e to the minus s squared over two - a fact worth a moment, since it is the same integral that reappears in section 11 when the lesson computes how well a polygon of a given number of sides could fence this region.</a:t>
             </a:r>
           </a:p>
           <a:p>
@@ -815,7 +815,7 @@
             </a:pPr>
             <a:r>
               <a:rPr/>
-              <a:t>Read the table from the top. A model that ignores its inputs entirely scores 0.5480. Logistic regression, fitted properly on 2,250 examples, scores 0.5507 — 27 ten-thousandths better than knowing nothing.</a:t>
+              <a:t>Read the table from the top. A model that ignores its inputs entirely scores 0.5480. Logistic regression, fitted properly on 2,250 examples, scores 0.5507 - 27 ten-thousandths better than knowing nothing.</a:t>
             </a:r>
           </a:p>
           <a:p>
@@ -947,7 +947,7 @@
             </a:r>
             <a:r>
               <a:rPr/>
-              <a:t> line does, because it is not what students expect. It does not attempt to enclose the accept region — it cannot — so it slices off one far tail of the distribution where almost every unit is a reject, and banks that. That is the honest ceiling for the family.</a:t>
+              <a:t> line does, because it is not what students expect. It does not attempt to enclose the accept region - it cannot - so it slices off one far tail of the distribution where almost every unit is a reject, and banks that. That is the honest ceiling for the family.</a:t>
             </a:r>
           </a:p>
           <a:p>
@@ -1043,7 +1043,7 @@
             </a:pPr>
             <a:r>
               <a:rPr/>
-              <a:t>This slide exists to head off the single most likely wrong diagnosis. A student who sees 0.5507 will reach for the optimiser: more iterations, a different solver, a smaller learning rate, scaling. None of it will help, and the reasoning behind reaching for it is perfectly sound — a score at chance usually does mean something failed to converge.</a:t>
+              <a:t>This slide exists to head off the single most likely wrong diagnosis. A student who sees 0.5507 will reach for the optimiser: more iterations, a different solver, a smaller learning rate, scaling. None of it will help, and the reasoning behind reaching for it is perfectly sound - a score at chance usually does mean something failed to converge.</a:t>
             </a:r>
           </a:p>
           <a:p>
@@ -1277,7 +1277,7 @@
             </a:pPr>
             <a:r>
               <a:rPr/>
-              <a:t>The last two bullets are the whole diagnosis. The problem is genuinely one-dimensional — everything depends on a single number, the sum of the two drifts — and it is still not linearly separable, because the question asked of that number needs two thresholds rather than one. Say that plainly: it is not about dimension, it is about how many boundaries the answer needs.</a:t>
+              <a:t>The last two bullets are the whole diagnosis. The problem is genuinely one-dimensional - everything depends on a single number, the sum of the two drifts - and it is still not linearly separable, because the question asked of that number needs two thresholds rather than one. Say that plainly: it is not about dimension, it is about how many boundaries the answer needs.</a:t>
             </a:r>
           </a:p>
           <a:p>
@@ -1373,7 +1373,7 @@
             </a:pPr>
             <a:r>
               <a:rPr/>
-              <a:t>This is the moment the lesson turns. Write the four hidden weights on the board if there is time — the first weight matrix is a column of ones beside a column of minus ones, both biases minus one, and the output weights are ten and ten. The handout works all four cloud centres through the network by hand in a table; do one row live, the plus-one plus-one corner, and let them check the rest afterwards.</a:t>
+              <a:t>This is the moment the lesson turns. Write the four hidden weights on the board if there is time - the first weight matrix is a column of ones beside a column of minus ones, both biases minus one, and the output weights are ten and ten. The handout works all four cloud centres through the network by hand in a table; do one row live, the plus-one plus-one corner, and let them check the rest afterwards.</a:t>
             </a:r>
           </a:p>
           <a:p>
@@ -1519,7 +1519,7 @@
             </a:pPr>
             <a:r>
               <a:rPr/>
-              <a:t>Ask the room what the hidden layer classified. The answer is nothing — and that is the next slide. Handout section 3.3.</a:t>
+              <a:t>Ask the room what the hidden layer classified. The answer is nothing - and that is the next slide. Handout section 3.3.</a:t>
             </a:r>
           </a:p>
         </p:txBody>
@@ -1711,7 +1711,7 @@
             </a:pPr>
             <a:r>
               <a:rPr/>
-              <a:t>Back to the acceptance data, with a trained four-unit hidden layer. Left: the four lines those units draw, plotted straight from the columns of the first weight matrix — not inferred from predictions, read off the parameters. Right: the decision region the four produce together, with the true circle dashed.</a:t>
+              <a:t>Back to the acceptance data, with a trained four-unit hidden layer. Left: the four lines those units draw, plotted straight from the columns of the first weight matrix - not inferred from predictions, read off the parameters. Right: the decision region the four produce together, with the true circle dashed.</a:t>
             </a:r>
           </a:p>
           <a:p>
@@ -1821,7 +1821,7 @@
             </a:pPr>
             <a:r>
               <a:rPr/>
-              <a:t>Hand back exercise 8 briefly. One sentence on what went well, one on the recurring gap — several reports quoted a silhouette score as though it validated the clustering, which is precisely the blind spot section 4 of that lesson was about.</a:t>
+              <a:t>Hand back exercise 8 briefly. One sentence on what went well, one on the recurring gap - several reports quoted a silhouette score as though it validated the clustering, which is precisely the blind spot section 4 of that lesson was about.</a:t>
             </a:r>
           </a:p>
           <a:p>
@@ -1843,7 +1843,7 @@
             </a:r>
             <a:r>
               <a:rPr/>
-              <a:t> like they work: a network with enough units will drive its training loss to essentially zero on any dataset you hand it, including one with random labels. Everything in this lesson that reads as caution — the seed-to-seed spreads in every table, the ceiling of 0.97, the selection-bias number in section 2 — is there because of that.</a:t>
+              <a:t> like they work: a network with enough units will drive its training loss to essentially zero on any dataset you hand it, including one with random labels. Everything in this lesson that reads as caution - the seed-to-seed spreads in every table, the ceiling of 0.97, the selection-bias number in section 2 - is there because of that.</a:t>
             </a:r>
           </a:p>
         </p:txBody>
@@ -1925,7 +1925,7 @@
             </a:pPr>
             <a:r>
               <a:rPr/>
-              <a:t>Twenty independent restarts at each width, on the drift problem. Two units are provably enough — the lesson wrote a two-unit solution down by hand three slides ago and it scored 0.9938 — and plain gradient descent finds something that good in four runs out of twenty.</a:t>
+              <a:t>Twenty independent restarts at each width, on the drift problem. Two units are provably enough - the lesson wrote a two-unit solution down by hand three slides ago and it scored 0.9938 - and plain gradient descent finds something that good in four runs out of twenty.</a:t>
             </a:r>
           </a:p>
           <a:p>
@@ -1953,7 +1953,7 @@
             </a:pPr>
             <a:r>
               <a:rPr/>
-              <a:t>The consequence is the honest reason production networks are wider than their task requires. The extra units are not extra capacity — they are extra starting points, so that some unit begins near a useful line.</a:t>
+              <a:t>The consequence is the honest reason production networks are wider than their task requires. The extra units are not extra capacity - they are extra starting points, so that some unit begins near a useful line.</a:t>
             </a:r>
           </a:p>
           <a:p>
@@ -2049,7 +2049,7 @@
             </a:pPr>
             <a:r>
               <a:rPr/>
-              <a:t>This is the capacity argument in one picture, and it is worth two minutes even though the segment is tight. The purple line is the best fence you could build from that many straight lines — a regular polygon, computed exactly rather than searched for. The blue line is what training actually reaches.</a:t>
+              <a:t>This is the capacity argument in one picture, and it is worth two minutes even though the segment is tight. The purple line is the best fence you could build from that many straight lines - a regular polygon, computed exactly rather than searched for. The blue line is what training actually reaches.</a:t>
             </a:r>
           </a:p>
           <a:p>
@@ -2071,7 +2071,7 @@
             </a:r>
             <a:r>
               <a:rPr/>
-              <a:t> the polygon, because H lines cut the plane into far more than one polygon and the output unit votes over the pieces. And past six units the trained curve flattens while the polygon curve keeps climbing towards the ceiling — the lines are available and gradient descent does not use them.</a:t>
+              <a:t> the polygon, because H lines cut the plane into far more than one polygon and the output unit votes over the pieces. And past six units the trained curve flattens while the polygon curve keeps climbing towards the ceiling - the lines are available and gradient descent does not use them.</a:t>
             </a:r>
           </a:p>
           <a:p>
@@ -2181,7 +2181,7 @@
             </a:pPr>
             <a:r>
               <a:rPr/>
-              <a:t>This theorem is cited far more often than it is read, and the citation almost always carries an implication the theorem does not license — that a network is guaranteed to work if you make it big enough.</a:t>
+              <a:t>This theorem is cited far more often than it is read, and the citation almost always carries an implication the theorem does not license - that a network is guaranteed to work if you make it big enough.</a:t>
             </a:r>
           </a:p>
           <a:p>
@@ -2401,7 +2401,7 @@
             </a:pPr>
             <a:r>
               <a:rPr/>
-              <a:t>Read the bracketed superscript as the layer index, not a power — say it once and it will not confuse anybody again. Z is the pre-activation, the raw weighted sum; A is what comes out after the activation function g.</a:t>
+              <a:t>Read the bracketed superscript as the layer index, not a power - say it once and it will not confuse anybody again. Z is the pre-activation, the raw weighted sum; A is what comes out after the activation function g.</a:t>
             </a:r>
           </a:p>
           <a:p>
@@ -2607,7 +2607,7 @@
             </a:pPr>
             <a:r>
               <a:rPr/>
-              <a:t>Ask the room what shape the gradient of the cost with respect to the first weight matrix must have. The answer — the same shape as the matrix itself — is the check that catches most transpose errors before they cost anything.</a:t>
+              <a:t>Ask the room what shape the gradient of the cost with respect to the first weight matrix must have. The answer - the same shape as the matrix itself - is the check that catches most transpose errors before they cost anything.</a:t>
             </a:r>
           </a:p>
           <a:p>
@@ -2813,7 +2813,7 @@
             </a:pPr>
             <a:r>
               <a:rPr/>
-              <a:t>Cross-entropy, unchanged from lesson 4 — say that explicitly, because students expect a new cost to come with a new model and it does not.</a:t>
+              <a:t>Cross-entropy, unchanged from lesson 4 - say that explicitly, because students expect a new cost to come with a new model and it does not.</a:t>
             </a:r>
           </a:p>
           <a:p>
@@ -2923,7 +2923,7 @@
             </a:pPr>
             <a:r>
               <a:rPr/>
-              <a:t>Twelve minutes. What comes back after the break is the derivation that makes all of this trainable — and the four-line check that tells you whether you got it right. Worth saying so before they leave the room.</a:t>
+              <a:t>Twelve minutes. What comes back after the break is the derivation that makes all of this trainable - and the four-line check that tells you whether you got it right. Worth saying so before they leave the room.</a:t>
             </a:r>
           </a:p>
         </p:txBody>
@@ -3019,7 +3019,7 @@
             </a:pPr>
             <a:r>
               <a:rPr/>
-              <a:t>Put the question to the room: given lesson 6’s kernel machines, which also draw curved boundaries, what is actually different here? The answer is who chose the family — with a kernel you did, in advance, and if you chose badly no amount of data repairs it; with a hidden layer the data chooses.</a:t>
+              <a:t>Put the question to the room: given lesson 6’s kernel machines, which also draw curved boundaries, what is actually different here? The answer is who chose the family - with a kernel you did, in advance, and if you chose badly no amount of data repairs it; with a hidden layer the data chooses.</a:t>
             </a:r>
           </a:p>
           <a:p>
@@ -3129,7 +3129,7 @@
             </a:pPr>
             <a:r>
               <a:rPr/>
-              <a:t>Say the 301,066 figure slowly — it is a real network from later in this lesson, two hidden layers of 512 units on eight-by-eight digit images — and let the absurdity land: three hundred thousand forward passes to take one step, and you would need thousands of steps.</a:t>
+              <a:t>Say the 301,066 figure slowly - it is a real network from later in this lesson, two hidden layers of 512 units on eight-by-eight digit images - and let the absurdity land: three hundred thousand forward passes to take one step, and you would need thousands of steps.</a:t>
             </a:r>
           </a:p>
           <a:p>
@@ -3225,7 +3225,7 @@
             </a:pPr>
             <a:r>
               <a:rPr/>
-              <a:t>The fourth bullet is the sentence students should be able to repeat to a friend without writing anything down, and it is worth asking someone to do exactly that before moving on. Both halves matter: how wrong the layer above was, and how much this particular weight contributed. A weight attached to a feature that was zero for every example gets no gradient no matter how wrong the output was — which is precisely the dead-unit failure later in the lesson.</a:t>
+              <a:t>The fourth bullet is the sentence students should be able to repeat to a friend without writing anything down, and it is worth asking someone to do exactly that before moving on. Both halves matter: how wrong the layer above was, and how much this particular weight contributed. A weight attached to a feature that was zero for every example gets no gradient no matter how wrong the output was - which is precisely the dead-unit failure later in the lesson.</a:t>
             </a:r>
           </a:p>
           <a:p>
@@ -3349,7 +3349,7 @@
             </a:pPr>
             <a:r>
               <a:rPr/>
-              <a:t>Then say why it is remarkable. Two messy derivatives went into it — the derivative of cross-entropy, which has a fraction with the prediction in the denominator, and the derivative of the sigmoid, which is a product — and what came out is a subtraction. Prediction minus truth, scaled by the number of examples. That is not luck, and the next slide says why.</a:t>
+              <a:t>Then say why it is remarkable. Two messy derivatives went into it - the derivative of cross-entropy, which has a fraction with the prediction in the denominator, and the derivative of the sigmoid, which is a product - and what came out is a subtraction. Prediction minus truth, scaled by the number of examples. That is not luck, and the next slide says why.</a:t>
             </a:r>
           </a:p>
           <a:p>
@@ -3555,7 +3555,7 @@
             </a:pPr>
             <a:r>
               <a:rPr/>
-              <a:t>The two multiplications on this slide are the entire algorithm, repeated once per layer. Emphasise that only one of them involves the data at all — the other is the same weight matrix used in the forward pass, transposed. That symmetry is why the backward pass costs about what the forward pass costs.</a:t>
+              <a:t>The two multiplications on this slide are the entire algorithm, repeated once per layer. Emphasise that only one of them involves the data at all - the other is the same weight matrix used in the forward pass, transposed. That symmetry is why the backward pass costs about what the forward pass costs.</a:t>
             </a:r>
           </a:p>
           <a:p>
@@ -3665,7 +3665,7 @@
             </a:pPr>
             <a:r>
               <a:rPr/>
-              <a:t>Read the two operations in order. First the matrix product with the transposed weights above, which redistributes the error at the layer above across the units that fed it. Then the circled dot — the elementwise product — with the activation’s derivative, which asks each unit how much it was actually responding when the example came through.</a:t>
+              <a:t>Read the two operations in order. First the matrix product with the transposed weights above, which redistributes the error at the layer above across the units that fed it. Then the circled dot - the elementwise product - with the activation’s derivative, which asks each unit how much it was actually responding when the example came through.</a:t>
             </a:r>
           </a:p>
           <a:p>
@@ -3803,7 +3803,7 @@
             </a:pPr>
             <a:r>
               <a:rPr/>
-              <a:t>The second is why anybody has ever had to think about batch size at all. Ask the room what they would expect to run out of first when training a deep network, time or memory. Most say time. The answer in practice is memory, and the reason is on this slide — every activation from the forward pass has to be kept alive until the backward pass consumes it.</a:t>
+              <a:t>The second is why anybody has ever had to think about batch size at all. Ask the room what they would expect to run out of first when training a deep network, time or memory. Most say time. The answer in practice is memory, and the reason is on this slide - every activation from the forward pass has to be kept alive until the backward pass consumes it.</a:t>
             </a:r>
           </a:p>
           <a:p>
@@ -3913,7 +3913,7 @@
             </a:pPr>
             <a:r>
               <a:rPr/>
-              <a:t>Ask the room how they would notice. The honest answer is that without this check they would not — they would conclude the architecture was wrong, or the learning rate, or the data, and they would be looking in the wrong place for as long as they had patience.</a:t>
+              <a:t>Ask the room how they would notice. The honest answer is that without this check they would not - they would conclude the architecture was wrong, or the learning rate, or the data, and they would be looking in the wrong place for as long as they had patience.</a:t>
             </a:r>
           </a:p>
           <a:p>
@@ -4023,7 +4023,7 @@
             </a:pPr>
             <a:r>
               <a:rPr/>
-              <a:t>Say what a failure would look like on this plot, because that is what students will actually meet: a bug rarely displaces every point. It displaces one parameter block — all the biases, say, or one weight matrix — so the picture shows a tight diagonal with a handful of points visibly off it, and the ones off it name the layer with the mistake.</a:t>
+              <a:t>Say what a failure would look like on this plot, because that is what students will actually meet: a bug rarely displaces every point. It displaces one parameter block - all the biases, say, or one weight matrix - so the picture shows a tight diagonal with a handful of points visibly off it, and the ones off it name the layer with the mistake.</a:t>
             </a:r>
           </a:p>
           <a:p>
@@ -4143,7 +4143,7 @@
             </a:pPr>
             <a:r>
               <a:rPr/>
-              <a:t>The cell worth protecting if time runs short is the gradient check — watching the worst relative disagreement print as ten to the minus eight lands the previous slide far harder than reading it does.</a:t>
+              <a:t>The cell worth protecting if time runs short is the gradient check - watching the worst relative disagreement print as ten to the minus eight lands the previous slide far harder than reading it does.</a:t>
             </a:r>
           </a:p>
           <a:p>
@@ -4253,7 +4253,7 @@
             </a:pPr>
             <a:r>
               <a:rPr/>
-              <a:t>Introduce all three problems at once, because the contrast between them is what stops this lesson from being propaganda for neural networks. On the acceptance data a linear model scores 0.55 and a network 0.94 — a 39-point gap. On the digits a linear model scores 0.93 and the best network here 0.97 — three and a half points. A lesson that only showed problems where networks win would teach the opposite of what is true.</a:t>
+              <a:t>Introduce all three problems at once, because the contrast between them is what stops this lesson from being propaganda for neural networks. On the acceptance data a linear model scores 0.55 and a network 0.94 - a 39-point gap. On the digits a linear model scores 0.93 and the best network here 0.97 - three and a half points. A lesson that only showed problems where networks win would teach the opposite of what is true.</a:t>
             </a:r>
           </a:p>
           <a:p>
@@ -4287,7 +4287,7 @@
             </a:r>
             <a:r>
               <a:rPr/>
-              <a:t>, which is why this lesson can quote both what a model scores and what it actually learned — a comparison Meridian’s own engineers could never make.</a:t>
+              <a:t>, which is why this lesson can quote both what a model scores and what it actually learned - a comparison Meridian’s own engineers could never make.</a:t>
             </a:r>
           </a:p>
           <a:p>
@@ -4391,7 +4391,7 @@
             </a:pPr>
             <a:r>
               <a:rPr/>
-              <a:t>The last bullet is the point of the slide, and it is worth deriving on the board if there is appetite — it is four lines, using only that the one-hot target sums to one. The full version is handout section 6.2.</a:t>
+              <a:t>The last bullet is the point of the slide, and it is worth deriving on the board if there is appetite - it is four lines, using only that the one-hot target sums to one. The full version is handout section 6.2.</a:t>
             </a:r>
           </a:p>
           <a:p>
@@ -4515,7 +4515,7 @@
             </a:pPr>
             <a:r>
               <a:rPr/>
-              <a:t>Read it in words: exponentiate every score, then divide by the total. The exponential makes everything positive; the division makes it sum to one. Monotone in each score, so the largest score still wins — softmax changes the confidences, never the ranking.</a:t>
+              <a:t>Read it in words: exponentiate every score, then divide by the total. The exponential makes everything positive; the division makes it sum to one. Monotone in each score, so the largest score still wins - softmax changes the confidences, never the ranking.</a:t>
             </a:r>
           </a:p>
           <a:p>
@@ -4883,21 +4883,21 @@
             </a:pPr>
             <a:r>
               <a:rPr/>
-              <a:t>Take the first two bullets quickly but do not skip them — the collapse of stacked linear layers is a one-line calculation and it is the reason the whole activation question exists. It is also worth naming the consequence: a network whose units have all saturated or all died has effectively performed that collapse on itself.</a:t>
-            </a:r>
-          </a:p>
-          <a:p>
-            <a:pPr lvl="0" indent="0" marL="0">
-              <a:buNone/>
-            </a:pPr>
-          </a:p>
-          <a:p>
-            <a:pPr lvl="0" indent="0" marL="0">
-              <a:buNone/>
-            </a:pPr>
-            <a:r>
-              <a:rPr/>
-              <a:t>Then the ¼. It is not an empirical observation, it is a maximum: the product of a number between zero and one with one minus itself cannot exceed a quarter. Ask the room where that maximum is attained, and why that is the worst possible place for it to be — the answer is at zero, which is exactly where a freshly initialised network’s pre-activations live.</a:t>
+              <a:t>Take the first two bullets quickly but do not skip them - the collapse of stacked linear layers is a one-line calculation and it is the reason the whole activation question exists. It is also worth naming the consequence: a network whose units have all saturated or all died has effectively performed that collapse on itself.</a:t>
+            </a:r>
+          </a:p>
+          <a:p>
+            <a:pPr lvl="0" indent="0" marL="0">
+              <a:buNone/>
+            </a:pPr>
+          </a:p>
+          <a:p>
+            <a:pPr lvl="0" indent="0" marL="0">
+              <a:buNone/>
+            </a:pPr>
+            <a:r>
+              <a:rPr/>
+              <a:t>Then the ¼. It is not an empirical observation, it is a maximum: the product of a number between zero and one with one minus itself cannot exceed a quarter. Ask the room where that maximum is attained, and why that is the worst possible place for it to be - the answer is at zero, which is exactly where a freshly initialised network’s pre-activations live.</a:t>
             </a:r>
           </a:p>
           <a:p>
@@ -4993,21 +4993,21 @@
             </a:pPr>
             <a:r>
               <a:rPr/>
-              <a:t>Left panel: three activation functions. Right panel: their derivatives, which is the quantity backpropagation actually multiplies by once per layer — point at the right panel, not the left, because that is where the content is.</a:t>
-            </a:r>
-          </a:p>
-          <a:p>
-            <a:pPr lvl="0" indent="0" marL="0">
-              <a:buNone/>
-            </a:pPr>
-          </a:p>
-          <a:p>
-            <a:pPr lvl="0" indent="0" marL="0">
-              <a:buNone/>
-            </a:pPr>
-            <a:r>
-              <a:rPr/>
-              <a:t>The horizontal line at a quarter is the subject of the previous slide. Note that tanh is every bit as much a squashing function as the sigmoid — same S shape, same saturation at both ends — and its derivative peaks at 1 rather than a quarter. That difference is the whole story, and it is why the slide after next reports tanh beating the rectified linear unit.</a:t>
+              <a:t>Left panel: three activation functions. Right panel: their derivatives, which is the quantity backpropagation actually multiplies by once per layer - point at the right panel, not the left, because that is where the content is.</a:t>
+            </a:r>
+          </a:p>
+          <a:p>
+            <a:pPr lvl="0" indent="0" marL="0">
+              <a:buNone/>
+            </a:pPr>
+          </a:p>
+          <a:p>
+            <a:pPr lvl="0" indent="0" marL="0">
+              <a:buNone/>
+            </a:pPr>
+            <a:r>
+              <a:rPr/>
+              <a:t>The horizontal line at a quarter is the subject of the previous slide. Note that tanh is every bit as much a squashing function as the sigmoid - same S shape, same saturation at both ends - and its derivative peaks at 1 rather than a quarter. That difference is the whole story, and it is why the slide after next reports tanh beating the rectified linear unit.</a:t>
             </a:r>
           </a:p>
           <a:p>
@@ -5117,7 +5117,7 @@
             </a:pPr>
             <a:r>
               <a:rPr/>
-              <a:t>Read the slope, not the endpoints. The sigmoid line falls by three and a half orders of magnitude from output to input; tanh and the rectified linear unit are flat. The per-layer factors measured across those eight seeds are 3.90, 3.97, 4.14, 4.05, 3.92, 4.31, 4.06 and 3.86 — all eight between 3.9 and 4.3, scattered around 4 exactly as the bound predicts.</a:t>
+              <a:t>Read the slope, not the endpoints. The sigmoid line falls by three and a half orders of magnitude from output to input; tanh and the rectified linear unit are flat. The per-layer factors measured across those eight seeds are 3.90, 3.97, 4.14, 4.05, 3.92, 4.31, 4.06 and 3.86 - all eight between 3.9 and 4.3, scattered around 4 exactly as the bound predicts.</a:t>
             </a:r>
           </a:p>
           <a:p>
@@ -5365,7 +5365,7 @@
             </a:pPr>
             <a:r>
               <a:rPr/>
-              <a:t>“Use the rectified linear unit” remains reasonable default advice — it is cheaper to compute and does not saturate for large positive input — but on six layers of 32 units those advantages do not show up, and pretending they did would be teaching a slogan instead of a mechanism. Say that out loud; students will meet the slogan everywhere else.</a:t>
+              <a:t>“Use the rectified linear unit” remains reasonable default advice - it is cheaper to compute and does not saturate for large positive input - but on six layers of 32 units those advantages do not show up, and pretending they did would be teaching a slogan instead of a mechanism. Say that out loud; students will meet the slogan everywhere else.</a:t>
             </a:r>
           </a:p>
           <a:p>
@@ -5489,7 +5489,7 @@
             </a:pPr>
             <a:r>
               <a:rPr/>
-              <a:t>The question for the room: both of the other two curves belong to squashing functions or to a function with a hard corner — so what exactly is the sigmoid guilty of? The answer is the quarter. tanh squashes just as hard and its derivative peaks at one, which is why it is up there with the rectified linear unit rather than down with the sigmoid.</a:t>
+              <a:t>The question for the room: both of the other two curves belong to squashing functions or to a function with a hard corner - so what exactly is the sigmoid guilty of? The answer is the quarter. tanh squashes just as hard and its derivative peaks at one, which is why it is up there with the rectified linear unit rather than down with the sigmoid.</a:t>
             </a:r>
           </a:p>
           <a:p>
@@ -5599,7 +5599,7 @@
             </a:pPr>
             <a:r>
               <a:rPr/>
-              <a:t>Land the last two bullets carefully, because everything in the next twenty minutes depends on them. Everything a single neuron can express is “which side of this line are you on, and how far”. Not “is this point unusual”, not “is this point inside a region” — one side of one line.</a:t>
+              <a:t>Land the last two bullets carefully, because everything in the next twenty minutes depends on them. Everything a single neuron can express is “which side of this line are you on, and how far”. Not “is this point unusual”, not “is this point inside a region” - one side of one line.</a:t>
             </a:r>
           </a:p>
           <a:p>
@@ -5719,7 +5719,7 @@
             </a:pPr>
             <a:r>
               <a:rPr/>
-              <a:t>Open by rebuilding notebook 01’s network in Keras and checking it lands in the same place — the point being that the library is a convenience, not a different algorithm, and that they now know what every one of those six lines does.</a:t>
+              <a:t>Open by rebuilding notebook 01’s network in Keras and checking it lands in the same place - the point being that the library is a convenience, not a different algorithm, and that they now know what every one of those six lines does.</a:t>
             </a:r>
           </a:p>
           <a:p>
@@ -5829,7 +5829,7 @@
             </a:pPr>
             <a:r>
               <a:rPr/>
-              <a:t>The usual explanation for random initialisation is symmetry — identical units receive identical gradients and stay identical for ever — and that argument is correct and applies to any initialisation that repeats a weight vector.</a:t>
+              <a:t>The usual explanation for random initialisation is symmetry - identical units receive identical gradients and stay identical for ever - and that argument is correct and applies to any initialisation that repeats a weight vector.</a:t>
             </a:r>
           </a:p>
           <a:p>
@@ -5857,7 +5857,7 @@
             </a:pPr>
             <a:r>
               <a:rPr/>
-              <a:t>The prediction is not approximate. The cost converges to the entropy of the label distribution, 0.6887 at a base rate of 0.5471, and the notebook measures 0.6887. Ask the room why that agreement is exact rather than close — because the mechanism is exact, not statistical.</a:t>
+              <a:t>The prediction is not approximate. The cost converges to the entropy of the label distribution, 0.6887 at a base rate of 0.5471, and the notebook measures 0.6887. Ask the room why that agreement is exact rather than close - because the mechanism is exact, not statistical.</a:t>
             </a:r>
           </a:p>
           <a:p>
@@ -6085,7 +6085,7 @@
             </a:pPr>
             <a:r>
               <a:rPr/>
-              <a:t>The two failure directions are worth contrasting explicitly because students expect “too large” to mean “explodes”. With tanh it cannot explode — the output is bounded by 1 — so it saturates instead, and a saturated layer passes signal forward and nothing backward. That is the vanishing gradient arriving from the other direction, which is a nice thing to notice out loud.</a:t>
+              <a:t>The two failure directions are worth contrasting explicitly because students expect “too large” to mean “explodes”. With tanh it cannot explode - the output is bounded by 1 - so it saturates instead, and a saturated layer passes signal forward and nothing backward. That is the vanishing gradient arriving from the other direction, which is a nice thing to notice out loud.</a:t>
             </a:r>
           </a:p>
           <a:p>
@@ -6195,7 +6195,7 @@
             </a:pPr>
             <a:r>
               <a:rPr/>
-              <a:t>Read the two ends against each other. At 0.001 the loss is still at 1.9550 when the epochs run out, and the seed-to-seed spread of 0.0794 is twenty times any other row’s — a network that has not settled anywhere. At 2.0 the accuracy is 0.1009, which is exact chance on ten classes: the steps overshoot every minimum they approach.</a:t>
+              <a:t>Read the two ends against each other. At 0.001 the loss is still at 1.9550 when the epochs run out, and the seed-to-seed spread of 0.0794 is twenty times any other row’s - a network that has not settled anywhere. At 2.0 the accuracy is 0.1009, which is exact chance on ten classes: the steps overshoot every minimum they approach.</a:t>
             </a:r>
           </a:p>
           <a:p>
@@ -6305,7 +6305,7 @@
             </a:pPr>
             <a:r>
               <a:rPr/>
-              <a:t>The useful range here spans about one and a half orders of magnitude, and it is found by sweeping, not by reasoning. Ask the room what the top curve would look like to someone who did not run this sweep — the answer is “a network that is too small”, which is the next slide.</a:t>
+              <a:t>The useful range here spans about one and a half orders of magnitude, and it is found by sweeping, not by reasoning. Ask the room what the top curve would look like to someone who did not run this sweep - the answer is “a network that is too small”, which is the next slide.</a:t>
             </a:r>
           </a:p>
           <a:p>
@@ -6401,21 +6401,21 @@
             </a:pPr>
             <a:r>
               <a:rPr/>
-              <a:t>This is the named predictable mistake of the segment, and the second bullet is the whole of it. The two situations produce the same symptoms, and the instinct to reach for capacity is not stupid — it is the textbook response to the textbook signature of underfitting. It is simply that the cause is in the optimiser rather than in the architecture, and adding capacity moves you further from the fix.</a:t>
-            </a:r>
-          </a:p>
-          <a:p>
-            <a:pPr lvl="0" indent="0" marL="0">
-              <a:buNone/>
-            </a:pPr>
-          </a:p>
-          <a:p>
-            <a:pPr lvl="0" indent="0" marL="0">
-              <a:buNone/>
-            </a:pPr>
-            <a:r>
-              <a:rPr/>
-              <a:t>The last bullet is a second instance of the same family. Five runs in eight finished above their own minimum, because a rate that is safe on a flat part of the cost surface is not safe on a sharper part reached later. Ask the room how they would detect that from a training curve — the answer is that the curve turning upward late is the signature, and it is invisible if you only look at the final number.</a:t>
+              <a:t>This is the named predictable mistake of the segment, and the second bullet is the whole of it. The two situations produce the same symptoms, and the instinct to reach for capacity is not stupid - it is the textbook response to the textbook signature of underfitting. It is simply that the cause is in the optimiser rather than in the architecture, and adding capacity moves you further from the fix.</a:t>
+            </a:r>
+          </a:p>
+          <a:p>
+            <a:pPr lvl="0" indent="0" marL="0">
+              <a:buNone/>
+            </a:pPr>
+          </a:p>
+          <a:p>
+            <a:pPr lvl="0" indent="0" marL="0">
+              <a:buNone/>
+            </a:pPr>
+            <a:r>
+              <a:rPr/>
+              <a:t>The last bullet is a second instance of the same family. Five runs in eight finished above their own minimum, because a rate that is safe on a flat part of the cost surface is not safe on a sharper part reached later. Ask the room how they would detect that from a training curve - the answer is that the curve turning upward late is the signature, and it is invisible if you only look at the final number.</a:t>
             </a:r>
           </a:p>
           <a:p>
@@ -6525,7 +6525,7 @@
             </a:pPr>
             <a:r>
               <a:rPr/>
-              <a:t>Land the last bullet rather than the drama. With half the layer dead the survivors absorb the work and accuracy drops by less than one point — nothing in the training curve announces the failure. That is what makes it dangerous: if that layer were your bottleneck, you would be tuning everything except the thing that is actually wrong.</a:t>
+              <a:t>Land the last bullet rather than the drama. With half the layer dead the survivors absorb the work and accuracy drops by less than one point - nothing in the training curve announces the failure. That is what makes it dangerous: if that layer were your bottleneck, you would be tuning everything except the thing that is actually wrong.</a:t>
             </a:r>
           </a:p>
           <a:p>
@@ -6635,7 +6635,7 @@
             </a:pPr>
             <a:r>
               <a:rPr/>
-              <a:t>That is what makes this failure worth naming. Nothing in the training curve announces it — accuracy is fine, the loss is fine, and a third of the layer has been doing nothing for the whole run. Ask the room how they would ever detect it. The answer is the one measurement on this slide: push the training data through and count the units whose maximum activation over the entire set is exactly zero.</a:t>
+              <a:t>That is what makes this failure worth naming. Nothing in the training curve announces it - accuracy is fine, the loss is fine, and a third of the layer has been doing nothing for the whole run. Ask the room how they would ever detect it. The answer is the one measurement on this slide: push the training data through and count the units whose maximum activation over the entire set is exactly zero.</a:t>
             </a:r>
           </a:p>
           <a:p>
@@ -6759,7 +6759,7 @@
             </a:pPr>
             <a:r>
               <a:rPr/>
-              <a:t>For Adam, the phrase worth remembering is per-parameter step size. A single global learning rate has to serve every coordinate, and coordinates differ enormously in scale — which is exactly the condition-number picture from lesson 3, now with one step size per direction.</a:t>
+              <a:t>For Adam, the phrase worth remembering is per-parameter step size. A single global learning rate has to serve every coordinate, and coordinates differ enormously in scale - which is exactly the condition-number picture from lesson 3, now with one step size per direction.</a:t>
             </a:r>
           </a:p>
           <a:p>
@@ -6855,7 +6855,7 @@
             </a:pPr>
             <a:r>
               <a:rPr/>
-              <a:t>Read it out in words rather than in symbols: take a weighted sum of the inputs, add a bias, squash it into the interval from zero to one. The squashing does not change which side of the line a point is on — the sigmoid is monotone — so the boundary is still exactly the straight line where the weighted sum vanishes.</a:t>
+              <a:t>Read it out in words rather than in symbols: take a weighted sum of the inputs, add a bias, squash it into the interval from zero to one. The squashing does not change which side of the line a point is on - the sigmoid is monotone - so the boundary is still exactly the straight line where the weighted sum vanishes.</a:t>
             </a:r>
           </a:p>
           <a:p>
@@ -6975,7 +6975,7 @@
             </a:r>
             <a:r>
               <a:rPr/>
-              <a:t> column before the mean. Adam’s mean is about a point above plain descent, which is unremarkable; its worst run is more than three points above, and its spread is less than half. What Adam bought is the disappearance of the bad case — which is exactly what notebook 01 spent five restarts buying by hand. Adam in one run matches what plain descent needed five to reach.</a:t>
+              <a:t> column before the mean. Adam’s mean is about a point above plain descent, which is unremarkable; its worst run is more than three points above, and its spread is less than half. What Adam bought is the disappearance of the bad case - which is exactly what notebook 01 spent five restarts buying by hand. Adam in one run matches what plain descent needed five to reach.</a:t>
             </a:r>
           </a:p>
           <a:p>
@@ -7011,7 +7011,7 @@
             </a:pPr>
             <a:r>
               <a:rPr/>
-              <a:t>The last column is the same networks scored against the true acceptance rule instead of the rig’s recorded verdict — about three points higher throughout, which is the measuring instrument, not the model. Handout sections 9.3 and 11.3.</a:t>
+              <a:t>The last column is the same networks scored against the true acceptance rule instead of the rig’s recorded verdict - about three points higher throughout, which is the measuring instrument, not the model. Handout sections 9.3 and 11.3.</a:t>
             </a:r>
           </a:p>
         </p:txBody>
@@ -7107,7 +7107,7 @@
             </a:pPr>
             <a:r>
               <a:rPr/>
-              <a:t>Now read the table the way lesson 5 asks. All three land between 0.7 and 1.0 points above early stopping alone, against a seed-to-seed spread of 0.1 to 0.7 points — one to two standard deviations. </a:t>
+              <a:t>Now read the table the way lesson 5 asks. All three land between 0.7 and 1.0 points above early stopping alone, against a seed-to-seed spread of 0.1 to 0.7 points - one to two standard deviations. </a:t>
             </a:r>
             <a:r>
               <a:rPr b="1"/>
@@ -7235,7 +7235,7 @@
             </a:pPr>
             <a:r>
               <a:rPr/>
-              <a:t>301,066 parameters on 300 training examples — a thousand parameters per example. On the left, training accuracy reaches 1.000 and stays there: the network has enough freedom to store the answers outright, and it does. Validation accuracy sits near 0.95 and stays there too, which classical bias-variance reasoning from lesson 5 does not lead you to expect.</a:t>
+              <a:t>301,066 parameters on 300 training examples - a thousand parameters per example. On the left, training accuracy reaches 1.000 and stays there: the network has enough freedom to store the answers outright, and it does. Validation accuracy sits near 0.95 and stays there too, which classical bias-variance reasoning from lesson 5 does not lead you to expect.</a:t>
             </a:r>
           </a:p>
           <a:p>
@@ -7257,7 +7257,7 @@
             </a:r>
             <a:r>
               <a:rPr/>
-              <a:t> bottoms out at epoch 13 — the dotted line — and then climbs for the rest of training, while validation </a:t>
+              <a:t> bottoms out at epoch 13 - the dotted line - and then climbs for the rest of training, while validation </a:t>
             </a:r>
             <a:r>
               <a:rPr i="1"/>
@@ -7265,7 +7265,7 @@
             </a:r>
             <a:r>
               <a:rPr/>
-              <a:t> holds flat and in fact peaks later, at epoch 17. The network is not getting more answers wrong — it is getting steadily more confident about the ones it already has wrong. Accuracy cannot see that; cross-entropy can. Ask the room which of the two they would early-stop on, and why.</a:t>
+              <a:t> holds flat and in fact peaks later, at epoch 17. The network is not getting more answers wrong - it is getting steadily more confident about the ones it already has wrong. Accuracy cannot see that; cross-entropy can. Ask the room which of the two they would early-stop on, and why.</a:t>
             </a:r>
           </a:p>
           <a:p>
@@ -7385,7 +7385,7 @@
             </a:pPr>
             <a:r>
               <a:rPr/>
-              <a:t>Two cells to protect. First, the overfitting run: a thousand parameters per training example, training accuracy at exactly 1.0000, and validation accuracy holding near 0.95 anyway. Classical bias–variance reasoning from lesson 5 does not lead you to expect that, and taking it seriously is an open research question — but taking it as licence to stop validating would be a serious mistake.</a:t>
+              <a:t>Two cells to protect. First, the overfitting run: a thousand parameters per training example, training accuracy at exactly 1.0000, and validation accuracy holding near 0.95 anyway. Classical bias–variance reasoning from lesson 5 does not lead you to expect that, and taking it seriously is an open research question - but taking it as licence to stop validating would be a serious mistake.</a:t>
             </a:r>
           </a:p>
           <a:p>
@@ -7495,7 +7495,7 @@
             </a:pPr>
             <a:r>
               <a:rPr/>
-              <a:t>The number to carry out of the room is the fourth bullet, and it is worth asking them to write it down: a sigmoid layer divides the gradient by about four, because its derivative cannot exceed a quarter. Not 4,607-fold — that was one draw of a compounding quantity, and the honest version is the per-layer factor.</a:t>
+              <a:t>The number to carry out of the room is the fourth bullet, and it is worth asking them to write it down: a sigmoid layer divides the gradient by about four, because its derivative cannot exceed a quarter. Not 4,607-fold - that was one draw of a compounding quantity, and the honest version is the per-layer factor.</a:t>
             </a:r>
           </a:p>
           <a:p>
@@ -7647,7 +7647,7 @@
             </a:pPr>
             <a:r>
               <a:rPr/>
-              <a:t>Two standing requirements, both of which today’s material makes easy to forget. Every reported difference needs the spread it was measured against — one seed is one draw, and this lesson has three separate tables where the seed-to-seed spread is comparable to the effect being reported. And any backward pass written by hand must be gradient-checked before any conclusion is drawn from what it trained; a wrong gradient trains, and it will not tell you.</a:t>
+              <a:t>Two standing requirements, both of which today’s material makes easy to forget. Every reported difference needs the spread it was measured against - one seed is one draw, and this lesson has three separate tables where the seed-to-seed spread is comparable to the effect being reported. And any backward pass written by hand must be gradient-checked before any conclusion is drawn from what it trained; a wrong gradient trains, and it will not tell you.</a:t>
             </a:r>
           </a:p>
           <a:p>
@@ -7867,7 +7867,7 @@
             </a:pPr>
             <a:r>
               <a:rPr/>
-              <a:t>Point directly at the wrong-coloured points scattered along the circle. Those are not model errors — nothing has been fitted yet. They are the 3% of verdicts the test rig recorded incorrectly, and they are the reason no score today can exceed 0.97.</a:t>
+              <a:t>Point directly at the wrong-coloured points scattered along the circle. Those are not model errors - nothing has been fitted yet. They are the 3% of verdicts the test rig recorded incorrectly, and they are the reason no score today can exceed 0.97.</a:t>
             </a:r>
           </a:p>
           <a:p>
@@ -7963,7 +7963,7 @@
             </a:pPr>
             <a:r>
               <a:rPr/>
-              <a:t>This is the payoff for the “try this” in the handout: the circle is not an arbitrary teaching choice, it falls out of the two tolerances being the same multiple of their own axis’s spread. Standardising is what makes that visible — in decibels and degrees the region is an ellipse and the coincidence is invisible.</a:t>
+              <a:t>This is the payoff for the “try this” in the handout: the circle is not an arbitrary teaching choice, it falls out of the two tolerances being the same multiple of their own axis’s spread. Standardising is what makes that visible - in decibels and degrees the region is an ellipse and the coincidence is invisible.</a:t>
             </a:r>
           </a:p>
           <a:p>
@@ -11064,7 +11064,7 @@
             </a:pPr>
             <a:r>
               <a:rPr/>
-              <a:t>Lesson 9 — Neural Networks</a:t>
+              <a:t>Lesson 9: Neural Networks</a:t>
             </a:r>
           </a:p>
         </p:txBody>
@@ -11100,7 +11100,7 @@
             <a:br/>
             <a:r>
               <a:rPr/>
-              <a:t>Fabio Antonini — Università degli Studi dell’Aquila</a:t>
+              <a:t>Fabio Antonini, Università degli Studi dell’Aquila</a:t>
             </a:r>
           </a:p>
         </p:txBody>
@@ -11256,7 +11256,7 @@
             </a:r>
             <a:r>
               <a:rPr/>
-              <a:t> — so standardised, the accept region is a circle of radius 1.25</a:t>
+              <a:t>, so standardised, the accept region is a circle of radius 1.25</a:t>
             </a:r>
           </a:p>
           <a:p>
@@ -11773,7 +11773,7 @@
             <a:pPr lvl="0"/>
             <a:r>
               <a:rPr/>
-              <a:t>Almost exactly the constant model — and the correct answer to the question a line can ask</a:t>
+              <a:t>Almost exactly the constant model, and the correct answer to the question a line can ask</a:t>
             </a:r>
           </a:p>
           <a:p>
@@ -12468,7 +12468,7 @@
             <a:pPr lvl="0"/>
             <a:r>
               <a:rPr/>
-              <a:t>One neuron is one line — and exactly where that runs out</a:t>
+              <a:t>One neuron is one line, and exactly where that runs out</a:t>
             </a:r>
           </a:p>
           <a:p>
@@ -12489,7 +12489,7 @@
             <a:pPr lvl="0"/>
             <a:r>
               <a:rPr/>
-              <a:t>Initialisation, optimisers, regularisation — the failure modes</a:t>
+              <a:t>Initialisation, optimisers, regularisation: the failure modes</a:t>
             </a:r>
           </a:p>
         </p:txBody>
@@ -13168,7 +13168,7 @@
             <a:pPr lvl="0"/>
             <a:r>
               <a:rPr/>
-              <a:t>Two units sufficed on the drift data — descent missed it 16 times in 20</a:t>
+              <a:t>Two units sufficed on the drift data: descent missed it 16 times in 20</a:t>
             </a:r>
           </a:p>
         </p:txBody>
@@ -13270,7 +13270,7 @@
             </a:r>
             <a:r>
               <a:rPr/>
-              <a:t> — as scikit-learn and Keras do</a:t>
+              <a:t>: as scikit-learn and Keras do</a:t>
             </a:r>
           </a:p>
           <a:p>
@@ -13945,7 +13945,7 @@
             <a:pPr lvl="0"/>
             <a:r>
               <a:rPr/>
-              <a:t>Nothing lets example 3 influence example 7 — which is what makes mini-batching valid</a:t>
+              <a:t>Nothing lets example 3 influence example 7, which is what makes mini-batching valid</a:t>
             </a:r>
           </a:p>
           <a:p>
@@ -14329,7 +14329,7 @@
             </a:r>
             <a:r>
               <a:rPr/>
-              <a:t>: one forward pass per parameter — 301,066 of them, for one step</a:t>
+              <a:t>: one forward pass per parameter, 301,066 of them, for one step</a:t>
             </a:r>
           </a:p>
           <a:p>
@@ -14655,7 +14655,7 @@
             <a:pPr lvl="0"/>
             <a:r>
               <a:rPr/>
-              <a:t>Squared error keeps that factor — and it is near zero exactly when the network is </a:t>
+              <a:t>Squared error keeps that factor, and it is near zero exactly when the network is </a:t>
             </a:r>
             <a:r>
               <a:rPr b="1"/>
@@ -14933,7 +14933,7 @@
             </a:r>
             <a:r>
               <a:rPr/>
-              <a:t> — this is what makes training feasible at all</a:t>
+              <a:t>: this is what makes training feasible at all</a:t>
             </a:r>
           </a:p>
           <a:p>
@@ -14951,7 +14951,7 @@
             <a:pPr lvl="0"/>
             <a:r>
               <a:rPr/>
-              <a:t>Memory grows with depth times batch size — and memory, not arithmetic, is what usually limits batch size</a:t>
+              <a:t>Memory grows with depth times batch size, and memory, not arithmetic, is what usually limits batch size</a:t>
             </a:r>
           </a:p>
         </p:txBody>
@@ -15046,7 +15046,7 @@
             <a:pPr lvl="0"/>
             <a:r>
               <a:rPr/>
-              <a:t>Compare each partial against a central difference — error of order h²</a:t>
+              <a:t>Compare each partial against a central difference: error of order h²</a:t>
             </a:r>
           </a:p>
           <a:p>
@@ -15457,7 +15457,7 @@
             <a:pPr lvl="0"/>
             <a:r>
               <a:rPr/>
-              <a:t>For K = 2 it reduces to the sigmoid — one construction, two sizes</a:t>
+              <a:t>For K = 2 it reduces to the sigmoid: one construction, two sizes</a:t>
             </a:r>
           </a:p>
           <a:p>
@@ -16082,7 +16082,7 @@
             <a:pPr lvl="0"/>
             <a:r>
               <a:rPr/>
-              <a:t>Digits vote pixel by pixel — the acceptance rule needed two measurements </a:t>
+              <a:t>Digits vote pixel by pixel: the acceptance rule needed two measurements </a:t>
             </a:r>
             <a:r>
               <a:rPr b="1"/>
@@ -16166,7 +16166,7 @@
             <a:pPr lvl="0"/>
             <a:r>
               <a:rPr/>
-              <a:t>Any number of linear layers composes to one — the activation is the entire reason depth buys anything</a:t>
+              <a:t>Any number of linear layers composes to one: the activation is the entire reason depth buys anything</a:t>
             </a:r>
           </a:p>
           <a:p>
@@ -16199,7 +16199,7 @@
             <a:pPr lvl="0"/>
             <a:r>
               <a:rPr/>
-              <a:t>Initialisation makes the weight factor about 1, leaving the derivative in charge — so </a:t>
+              <a:t>Initialisation makes the weight factor about 1, leaving the derivative in charge, so </a:t>
             </a:r>
             <a:r>
               <a:rPr b="1"/>
@@ -16586,7 +16586,7 @@
             </a:r>
             <a:r>
               <a:rPr/>
-              <a:t> — exact chance on ten classes</a:t>
+              <a:t>, exact chance on ten classes</a:t>
             </a:r>
           </a:p>
           <a:p>
@@ -16623,7 +16623,7 @@
             <a:pPr lvl="0"/>
             <a:r>
               <a:rPr/>
-              <a:t>What kills the sigmoid is not squashing — it is </a:t>
+              <a:t>What kills the sigmoid is not squashing: it is </a:t>
             </a:r>
             <a:r>
               <a:rPr i="1"/>
@@ -16748,7 +16748,7 @@
             </a:r>
             <a:r>
               <a:rPr/>
-              <a:t> — so every score today is read against a ceiling of </a:t>
+              <a:t>, so every score today is read against a ceiling of </a:t>
             </a:r>
             <a:r>
               <a:rPr b="1"/>
@@ -16937,7 +16937,7 @@
             <a:pPr lvl="0"/>
             <a:r>
               <a:rPr/>
-              <a:t>The same network again, this time in six lines of Keras — and the same answer</a:t>
+              <a:t>The same network again, this time in six lines of Keras, and the same answer</a:t>
             </a:r>
           </a:p>
           <a:p>
@@ -17053,7 +17053,7 @@
             </a:r>
             <a:r>
               <a:rPr/>
-              <a:t> a network — hidden and output weights both receive exactly zero gradient</a:t>
+              <a:t> a network: hidden and output weights both receive exactly zero gradient</a:t>
             </a:r>
           </a:p>
           <a:p>
@@ -17251,7 +17251,7 @@
             <a:pPr lvl="0"/>
             <a:r>
               <a:rPr/>
-              <a:t>Set Var(w) = 1/n — </a:t>
+              <a:t>Set Var(w) = 1/n, which is </a:t>
             </a:r>
             <a:r>
               <a:rPr b="1"/>
@@ -17259,7 +17259,7 @@
             </a:r>
             <a:r>
               <a:rPr/>
-              <a:t>. The ReLU halves it again, so it wants 2/n — </a:t>
+              <a:t>. The ReLU halves it again, so it wants 2/n, </a:t>
             </a:r>
             <a:r>
               <a:rPr b="1"/>
@@ -17923,7 +17923,7 @@
             </a:r>
             <a:r>
               <a:rPr/>
-              <a:t> — both accuracies low</a:t>
+              <a:t>: both accuracies low</a:t>
             </a:r>
           </a:p>
           <a:p>
@@ -18017,7 +18017,7 @@
             <a:pPr lvl="0"/>
             <a:r>
               <a:rPr/>
-              <a:t>Its derivative is exactly 1 on the active side — so, no vanishing gradient</a:t>
+              <a:t>Its derivative is exactly 1 on the active side: so, no vanishing gradient</a:t>
             </a:r>
           </a:p>
           <a:p>
@@ -18058,7 +18058,7 @@
             </a:r>
             <a:r>
               <a:rPr/>
-              <a:t> — accuracy 0.9583 against a best of 0.9667</a:t>
+              <a:t>: accuracy 0.9583 against a best of 0.9667</a:t>
             </a:r>
           </a:p>
         </p:txBody>
@@ -18234,7 +18234,7 @@
             <a:pPr lvl="0"/>
             <a:r>
               <a:rPr/>
-              <a:t>What is new is one word — </a:t>
+              <a:t>What is new is one word: </a:t>
             </a:r>
             <a:r>
               <a:rPr b="1"/>
@@ -18351,7 +18351,7 @@
             </a:r>
             <a:r>
               <a:rPr/>
-              <a:t> averages past gradients — oscillations cancel, and lesson 3’s stretched valley is repaired</a:t>
+              <a:t> averages past gradients: oscillations cancel, and lesson 3’s stretched valley is repaired</a:t>
             </a:r>
           </a:p>
           <a:p>
@@ -19418,7 +19418,7 @@
             </a:r>
             <a:r>
               <a:rPr/>
-              <a:t> — memorises, generalises anyway</a:t>
+              <a:t>: memorises, generalises anyway</a:t>
             </a:r>
           </a:p>
           <a:p>
@@ -19532,7 +19532,7 @@
             </a:r>
             <a:r>
               <a:rPr/>
-              <a:t> — three enclose a region, one never does</a:t>
+              <a:t>: three enclose a region, one never does</a:t>
             </a:r>
           </a:p>
           <a:p>
@@ -19554,7 +19554,7 @@
             </a:r>
             <a:r>
               <a:rPr/>
-              <a:t> — so gradient-check it</a:t>
+              <a:t>: so gradient-check it</a:t>
             </a:r>
           </a:p>
           <a:p>

--- a/Lessons/09_neural_networks/Slides/neural_networks_slides.pptx
+++ b/Lessons/09_neural_networks/Slides/neural_networks_slides.pptx
@@ -7509,7 +7509,7 @@
             </a:pPr>
             <a:r>
               <a:rPr/>
-              <a:t>That is the fifth of these carry-home numbers the course has produced: 77% accuracy on coin-flip labels, 98 of 128 imputed rows that borrowed from the test set, an overfitted coefficient of 247,514, 37 of 40 disguised accounts caught by reconstruction error, and now a factor of four per sigmoid layer.</a:t>
+              <a:t>That is the fifth of these carry-home numbers the course has produced: 77% accuracy on coin-flip labels, 98 of 128 imputed rows that borrowed from the test set, a coefficient of 365 where an unpenalised fit wanted billions, 37 of 40 disguised accounts caught by reconstruction error, and now a factor of four per sigmoid layer.</a:t>
             </a:r>
           </a:p>
           <a:p>

--- a/Lessons/09_neural_networks/Slides/neural_networks_slides.pptx
+++ b/Lessons/09_neural_networks/Slides/neural_networks_slides.pptx
@@ -6539,7 +6539,7 @@
             </a:pPr>
             <a:r>
               <a:rPr/>
-              <a:t>The figure is in handout section 7.4, and notebook 03 reproduces the sweep. Ask the room how they would check. Counting units whose activation is zero on every training example takes one line.</a:t>
+              <a:t>Handout section 7.4 carries this measurement, and notebook 03 reproduces the sweep. The picture of it is the next slide, so do not point at anything yet. Ask the room how they would check. Counting units whose activation is zero on every training example takes one line.</a:t>
             </a:r>
           </a:p>
         </p:txBody>

--- a/Lessons/09_neural_networks/Slides/neural_networks_slides.pptx
+++ b/Lessons/09_neural_networks/Slides/neural_networks_slides.pptx
@@ -7509,7 +7509,7 @@
             </a:pPr>
             <a:r>
               <a:rPr/>
-              <a:t>That is the fifth of these carry-home numbers the course has produced: 77% accuracy on coin-flip labels, 98 of 128 imputed rows that borrowed from the test set, a coefficient of 365 where an unpenalised fit wanted billions, 37 of 40 disguised accounts caught by reconstruction error, and now a factor of four per sigmoid layer.</a:t>
+              <a:t>That is the fifth of these carry-home numbers the course has produced: 77% accuracy on coin-flip labels, 94 of 128 imputed rows that borrowed from the test set, a coefficient of 365 where an unpenalised fit wanted billions, 37 of 40 disguised accounts caught by reconstruction error, and now a factor of four per sigmoid layer.</a:t>
             </a:r>
           </a:p>
           <a:p>
@@ -11994,19 +11994,16 @@
             <a:pPr lvl="0"/>
             <a:r>
               <a:rPr/>
-              <a:t>Same-direction drift: removable. Opposite drift: not</a:t>
-            </a:r>
-          </a:p>
-          <a:p>
-            <a:pPr lvl="0"/>
-            <a:r>
-              <a:rPr/>
-              <a:t>Correctable when the two drifts </a:t>
+              <a:t>Removable only when the two drifts </a:t>
             </a:r>
             <a:r>
               <a:rPr b="1"/>
               <a:t>share a sign</a:t>
             </a:r>
+            <a:r>
+              <a:rPr/>
+              <a:t>; opposite drifts are not</a:t>
+            </a:r>
           </a:p>
           <a:p>
             <a:pPr lvl="0"/>
@@ -12037,14 +12034,11 @@
             <a:pPr lvl="0"/>
             <a:r>
               <a:rPr/>
-              <a:t>“Large in absolute value” is the outside of a strip</a:t>
-            </a:r>
-          </a:p>
-          <a:p>
-            <a:pPr lvl="0"/>
+              <a:t>“Large in absolute value” is the outside of a strip: </a:t>
+            </a:r>
             <a:r>
               <a:rPr b="1"/>
-              <a:t>Two boundaries, not one</a:t>
+              <a:t>two boundaries, not one</a:t>
             </a:r>
           </a:p>
         </p:txBody>
@@ -12151,27 +12145,16 @@
           <a:p>
             <a:pPr lvl="0"/>
             <a:r>
-              <a:rPr/>
-              <a:t>Over all 800 units, </a:t>
-            </a:r>
-            <a:r>
               <a:rPr b="1"/>
-              <a:t>nothing trained</a:t>
-            </a:r>
-            <a:r>
-              <a:rPr/>
-              <a:t>, it scores </a:t>
+              <a:t>Nothing trained</a:t>
+            </a:r>
+            <a:r>
+              <a:rPr/>
+              <a:t>, and over all 800 units it scores </a:t>
             </a:r>
             <a:r>
               <a:rPr b="1"/>
               <a:t>0.9938</a:t>
-            </a:r>
-          </a:p>
-          <a:p>
-            <a:pPr lvl="0"/>
-            <a:r>
-              <a:rPr/>
-              <a:t>Chosen by reasoning about the problem, and they work</a:t>
             </a:r>
           </a:p>
         </p:txBody>
@@ -15345,7 +15328,7 @@
             <a:pPr lvl="0"/>
             <a:r>
               <a:rPr/>
-              <a:t>Backpropagation written from scratch, and gradient-checked before it is trusted with anything</a:t>
+              <a:t>Backpropagation from scratch, gradient-checked before it is trusted</a:t>
             </a:r>
           </a:p>
           <a:p>
@@ -15359,14 +15342,14 @@
             <a:pPr lvl="0"/>
             <a:r>
               <a:rPr/>
-              <a:t>The polygon yardstick: how well could H lines possibly fence a circle?</a:t>
+              <a:t>The polygon yardstick: how well could H lines fence a circle?</a:t>
             </a:r>
           </a:p>
           <a:p>
             <a:pPr lvl="0"/>
             <a:r>
               <a:rPr/>
-              <a:t>The one initialisation that cannot work, and the exact cost it converges to</a:t>
+              <a:t>The one initialisation that cannot work, and the cost it converges to</a:t>
             </a:r>
           </a:p>
         </p:txBody>
@@ -16166,7 +16149,7 @@
             <a:pPr lvl="0"/>
             <a:r>
               <a:rPr/>
-              <a:t>Any number of linear layers composes to one: the activation is the entire reason depth buys anything</a:t>
+              <a:t>Any number of linear layers composes to one: the activation is the whole reason depth buys anything</a:t>
             </a:r>
           </a:p>
           <a:p>
@@ -16181,7 +16164,7 @@
             </a:r>
             <a:r>
               <a:rPr/>
-              <a:t>, at zero and nowhere else</a:t>
+              <a:t>, at zero only</a:t>
             </a:r>
           </a:p>
           <a:p>
@@ -16199,7 +16182,7 @@
             <a:pPr lvl="0"/>
             <a:r>
               <a:rPr/>
-              <a:t>Initialisation makes the weight factor about 1, leaving the derivative in charge, so </a:t>
+              <a:t>Initialisation leaves the weight factor near 1, so the derivative decides: </a:t>
             </a:r>
             <a:r>
               <a:rPr b="1"/>
@@ -16458,7 +16441,7 @@
             <a:pPr lvl="0"/>
             <a:r>
               <a:rPr/>
-              <a:t>Across the same eight seeds it ranges </a:t>
+              <a:t>Over the same eight seeds it ranges </a:t>
             </a:r>
             <a:r>
               <a:rPr b="1"/>
@@ -16469,7 +16452,7 @@
             <a:pPr lvl="0"/>
             <a:r>
               <a:rPr/>
-              <a:t>Quoting the largest would report one draw as though it were a law</a:t>
+              <a:t>Quoting the largest reports one draw as a law</a:t>
             </a:r>
           </a:p>
           <a:p>
@@ -16483,7 +16466,7 @@
             <a:pPr lvl="0"/>
             <a:r>
               <a:rPr/>
-              <a:t>By depth: 9.5 at two layers, 170 at four, 3,553 at six, 46,250 at eight</a:t>
+              <a:t>By depth: 9.5, 170, 3,553, 46,250 at two, four, six and eight layers</a:t>
             </a:r>
           </a:p>
         </p:txBody>
@@ -17053,21 +17036,21 @@
             </a:r>
             <a:r>
               <a:rPr/>
-              <a:t> a network: hidden and output weights both receive exactly zero gradient</a:t>
+              <a:t> a network: every gradient is exactly zero</a:t>
             </a:r>
           </a:p>
           <a:p>
             <a:pPr lvl="0"/>
             <a:r>
               <a:rPr b="1"/>
-              <a:t>Every parameter is frozen except the output bias</a:t>
+              <a:t>Only the output bias ever moves</a:t>
             </a:r>
           </a:p>
           <a:p>
             <a:pPr lvl="0"/>
             <a:r>
               <a:rPr/>
-              <a:t>That bias converges to the base rate, so the cost converges to the label entropy: </a:t>
+              <a:t>The bias converges to the base rate, so the cost converges to the label entropy: </a:t>
             </a:r>
             <a:r>
               <a:rPr b="1"/>
@@ -17078,7 +17061,7 @@
             <a:pPr lvl="0"/>
             <a:r>
               <a:rPr/>
-              <a:t>Distinct hidden columns afterwards: </a:t>
+              <a:t>Distinct hidden columns: </a:t>
             </a:r>
             <a:r>
               <a:rPr b="1"/>
@@ -17251,7 +17234,7 @@
             <a:pPr lvl="0"/>
             <a:r>
               <a:rPr/>
-              <a:t>Set Var(w) = 1/n, which is </a:t>
+              <a:t>Set Var(w) = 1/n: </a:t>
             </a:r>
             <a:r>
               <a:rPr b="1"/>
@@ -17259,7 +17242,7 @@
             </a:r>
             <a:r>
               <a:rPr/>
-              <a:t>. The ReLU halves it again, so it wants 2/n, </a:t>
+              <a:t>. ReLU halves it, so it wants 2/n: </a:t>
             </a:r>
             <a:r>
               <a:rPr b="1"/>
@@ -17285,14 +17268,14 @@
             </a:r>
             <a:r>
               <a:rPr/>
-              <a:t> rather than exploding: 73% of the last layer past 0.99 in absolute value</a:t>
+              <a:t> rather than exploding: 73% of the last layer past 0.99</a:t>
             </a:r>
           </a:p>
           <a:p>
             <a:pPr lvl="0"/>
             <a:r>
               <a:rPr/>
-              <a:t>Glorot loses about half its spread over eight layers</a:t>
+              <a:t>Glorot loses half its spread over eight layers</a:t>
             </a:r>
           </a:p>
         </p:txBody>
@@ -19539,22 +19522,26 @@
             <a:pPr lvl="0"/>
             <a:r>
               <a:rPr/>
-              <a:t>A hidden layer does not classify: it </a:t>
+              <a:t>A hidden layer </a:t>
             </a:r>
             <a:r>
               <a:rPr b="1"/>
               <a:t>moves the data</a:t>
             </a:r>
+            <a:r>
+              <a:rPr/>
+              <a:t>; it does not classify</a:t>
+            </a:r>
           </a:p>
           <a:p>
             <a:pPr lvl="0"/>
             <a:r>
               <a:rPr b="1"/>
-              <a:t>Backpropagation is the chain rule right to left</a:t>
-            </a:r>
-            <a:r>
-              <a:rPr/>
-              <a:t>: so gradient-check it</a:t>
+              <a:t>Backpropagation is the chain rule</a:t>
+            </a:r>
+            <a:r>
+              <a:rPr/>
+              <a:t> - so gradient-check it</a:t>
             </a:r>
           </a:p>
           <a:p>
@@ -19568,7 +19555,7 @@
             <a:pPr lvl="0"/>
             <a:r>
               <a:rPr/>
-              <a:t>Report a difference with the spread it was measured against</a:t>
+              <a:t>Report a difference with its spread</a:t>
             </a:r>
           </a:p>
         </p:txBody>

--- a/Lessons/09_neural_networks/Slides/neural_networks_slides.pptx
+++ b/Lessons/09_neural_networks/Slides/neural_networks_slides.pptx
@@ -12027,7 +12027,7 @@
             <a:pPr lvl="0"/>
             <a:r>
               <a:rPr/>
-              <a:t>Coding the channels as ± 1, the rule is about |a + b|</a:t>
+              <a:t>Coding the channels as ±1, the rule is about |a + b|</a:t>
             </a:r>
           </a:p>
           <a:p>

--- a/Lessons/09_neural_networks/Slides/neural_networks_slides.pptx
+++ b/Lessons/09_neural_networks/Slides/neural_networks_slides.pptx
@@ -13614,7 +13614,7 @@
                       </a:pPr>
                       <a:r>
                         <a:rPr/>
-                        <a:t>W[¹]</a:t>
+                        <a:t>W, layer 1</a:t>
                       </a:r>
                     </a:p>
                   </a:txBody>
@@ -13661,7 +13661,7 @@
                       </a:pPr>
                       <a:r>
                         <a:rPr/>
-                        <a:t>b[¹]</a:t>
+                        <a:t>b, layer 1</a:t>
                       </a:r>
                     </a:p>
                   </a:txBody>
@@ -13708,7 +13708,7 @@
                       </a:pPr>
                       <a:r>
                         <a:rPr/>
-                        <a:t>Z[¹], A[¹]</a:t>
+                        <a:t>Z and A, layer 1</a:t>
                       </a:r>
                     </a:p>
                   </a:txBody>
@@ -13755,7 +13755,7 @@
                       </a:pPr>
                       <a:r>
                         <a:rPr/>
-                        <a:t>W[²]</a:t>
+                        <a:t>W, layer 2</a:t>
                       </a:r>
                     </a:p>
                   </a:txBody>

--- a/Lessons/09_neural_networks/Slides/neural_networks_slides.pptx
+++ b/Lessons/09_neural_networks/Slides/neural_networks_slides.pptx
@@ -13802,7 +13802,7 @@
                       </a:pPr>
                       <a:r>
                         <a:rPr/>
-                        <a:t>y</a:t>
+                        <a:t>ŷ</a:t>
                       </a:r>
                     </a:p>
                   </a:txBody>

--- a/Lessons/09_neural_networks/Slides/neural_networks_slides.pptx
+++ b/Lessons/09_neural_networks/Slides/neural_networks_slides.pptx
@@ -7633,7 +7633,7 @@
             </a:pPr>
             <a:r>
               <a:rPr/>
-              <a:t>Set it explicitly and say the deadline out loud: Friday 27 November, 23:59, at the start of lesson 10.</a:t>
+              <a:t>Set it explicitly and say the deadline out loud: Friday 27 November, 09:00, at the start of lesson 10.</a:t>
             </a:r>
           </a:p>
           <a:p>
@@ -19643,7 +19643,7 @@
             </a:r>
             <a:r>
               <a:rPr b="1"/>
-              <a:t>Friday 27 November 2026, 23:59</a:t>
+              <a:t>Friday 27 November 2026, 09:00</a:t>
             </a:r>
           </a:p>
           <a:p>

--- a/Lessons/09_neural_networks/Slides/neural_networks_slides.pptx
+++ b/Lessons/09_neural_networks/Slides/neural_networks_slides.pptx
@@ -1821,7 +1821,7 @@
             </a:pPr>
             <a:r>
               <a:rPr/>
-              <a:t>Hand back exercise 8 briefly. One sentence on what went well, one on the recurring gap - several reports quoted a silhouette score as though it validated the clustering, which is precisely the blind spot section 4 of that lesson was about.</a:t>
+              <a:t>Nothing to collect and nothing to hand back - discuss it. Ask what the silhouette score was taken to prove, and listen for it being treated as validation of the clustering, which is precisely the blind spot section 4 of that lesson was about.</a:t>
             </a:r>
           </a:p>
           <a:p>
@@ -7633,7 +7633,7 @@
             </a:pPr>
             <a:r>
               <a:rPr/>
-              <a:t>Set it explicitly and say the deadline out loud: Friday 27 November, 09:00, at the start of lesson 10.</a:t>
+              <a:t>Set it explicitly and say out loud when it comes back: the first ten minutes of lesson 10, Friday 27 November.</a:t>
             </a:r>
           </a:p>
           <a:p>
@@ -14083,7 +14083,7 @@
             </a:pPr>
             <a:r>
               <a:rPr/>
-              <a:t>Exercise 8 returned</a:t>
+              <a:t>Exercise 8, before we start</a:t>
             </a:r>
           </a:p>
         </p:txBody>
@@ -14111,7 +14111,7 @@
             <a:pPr lvl="0"/>
             <a:r>
               <a:rPr/>
-              <a:t>Marks were for </a:t>
+              <a:t>What counts is </a:t>
             </a:r>
             <a:r>
               <a:rPr b="1"/>
@@ -14119,14 +14119,14 @@
             </a:r>
             <a:r>
               <a:rPr/>
-              <a:t>, not for the score itself</a:t>
+              <a:t>, not the score itself</a:t>
             </a:r>
           </a:p>
           <a:p>
             <a:pPr lvl="0"/>
             <a:r>
               <a:rPr/>
-              <a:t>Recurring gap: a silhouette reported as endorsement of a clustering, when it can only endorse roundness</a:t>
+              <a:t>The gap to watch for: a silhouette reported as endorsement of a clustering, when it can only endorse roundness</a:t>
             </a:r>
           </a:p>
           <a:p>
@@ -19639,11 +19639,11 @@
             </a:r>
             <a:r>
               <a:rPr/>
-              <a:t>, due </a:t>
+              <a:t>, discussed at the start of </a:t>
             </a:r>
             <a:r>
               <a:rPr b="1"/>
-              <a:t>Friday 27 November 2026, 09:00</a:t>
+              <a:t>Friday 27 November</a:t>
             </a:r>
           </a:p>
           <a:p>

--- a/Lessons/09_neural_networks/Slides/neural_networks_slides.pptx
+++ b/Lessons/09_neural_networks/Slides/neural_networks_slides.pptx
@@ -11347,8 +11347,8 @@
         </p:blipFill>
         <p:spPr bwMode="auto">
           <a:xfrm>
-            <a:off x="457200" y="2585839"/>
-            <a:ext cx="8229600" cy="520700"/>
+            <a:off x="457200" y="2611239"/>
+            <a:ext cx="8229599" cy="469900"/>
           </a:xfrm>
           <a:prstGeom prst="rect">
             <a:avLst/>
@@ -11424,7 +11424,7 @@
           </p:nvPr>
         </p:nvGraphicFramePr>
         <p:xfrm>
-          <a:off x="457200" y="1193800"/>
+          <a:off x="457200" y="1166099"/>
           <a:ext cx="8229600" cy="3390900"/>
         </p:xfrm>
         <a:graphic>
@@ -12622,7 +12622,7 @@
           </p:nvPr>
         </p:nvGraphicFramePr>
         <p:xfrm>
-          <a:off x="457200" y="1193800"/>
+          <a:off x="457200" y="1166099"/>
           <a:ext cx="8229600" cy="3390900"/>
         </p:xfrm>
         <a:graphic>
@@ -13333,8 +13333,8 @@
         </p:blipFill>
         <p:spPr bwMode="auto">
           <a:xfrm>
-            <a:off x="457200" y="2490589"/>
-            <a:ext cx="8229600" cy="711200"/>
+            <a:off x="457200" y="2535039"/>
+            <a:ext cx="8229600" cy="622300"/>
           </a:xfrm>
           <a:prstGeom prst="rect">
             <a:avLst/>
@@ -13415,8 +13415,8 @@
         </p:blipFill>
         <p:spPr bwMode="auto">
           <a:xfrm>
-            <a:off x="457200" y="2490589"/>
-            <a:ext cx="8229600" cy="711200"/>
+            <a:off x="457200" y="2528689"/>
+            <a:ext cx="8229600" cy="635000"/>
           </a:xfrm>
           <a:prstGeom prst="rect">
             <a:avLst/>
@@ -13492,7 +13492,7 @@
           </p:nvPr>
         </p:nvGraphicFramePr>
         <p:xfrm>
-          <a:off x="457200" y="1193800"/>
+          <a:off x="457200" y="1166099"/>
           <a:ext cx="8229600" cy="3390900"/>
         </p:xfrm>
         <a:graphic>
@@ -14022,8 +14022,8 @@
         </p:blipFill>
         <p:spPr bwMode="auto">
           <a:xfrm>
-            <a:off x="457200" y="2204839"/>
-            <a:ext cx="8229600" cy="1282700"/>
+            <a:off x="457200" y="2236589"/>
+            <a:ext cx="8229600" cy="1219200"/>
           </a:xfrm>
           <a:prstGeom prst="rect">
             <a:avLst/>
@@ -14516,8 +14516,8 @@
         </p:blipFill>
         <p:spPr bwMode="auto">
           <a:xfrm>
-            <a:off x="457202" y="1976240"/>
-            <a:ext cx="8229595" cy="1739899"/>
+            <a:off x="2021008" y="2361973"/>
+            <a:ext cx="5101983" cy="968432"/>
           </a:xfrm>
           <a:prstGeom prst="rect">
             <a:avLst/>
@@ -14816,8 +14816,8 @@
         </p:blipFill>
         <p:spPr bwMode="auto">
           <a:xfrm>
-            <a:off x="457205" y="2408040"/>
-            <a:ext cx="8229590" cy="876299"/>
+            <a:off x="457200" y="2452489"/>
+            <a:ext cx="8229600" cy="787400"/>
           </a:xfrm>
           <a:prstGeom prst="rect">
             <a:avLst/>
@@ -15535,8 +15535,8 @@
         </p:blipFill>
         <p:spPr bwMode="auto">
           <a:xfrm>
-            <a:off x="457200" y="1487289"/>
-            <a:ext cx="8229600" cy="2717800"/>
+            <a:off x="1307167" y="1813333"/>
+            <a:ext cx="6529665" cy="2065712"/>
           </a:xfrm>
           <a:prstGeom prst="rect">
             <a:avLst/>
@@ -15612,7 +15612,7 @@
           </p:nvPr>
         </p:nvGraphicFramePr>
         <p:xfrm>
-          <a:off x="457200" y="1193800"/>
+          <a:off x="457200" y="1166099"/>
           <a:ext cx="8229600" cy="3390900"/>
         </p:xfrm>
         <a:graphic>
@@ -17343,7 +17343,7 @@
           </p:nvPr>
         </p:nvGraphicFramePr>
         <p:xfrm>
-          <a:off x="457200" y="1193800"/>
+          <a:off x="457200" y="1166099"/>
           <a:ext cx="8229600" cy="3390900"/>
         </p:xfrm>
         <a:graphic>
@@ -18420,7 +18420,7 @@
           </p:nvPr>
         </p:nvGraphicFramePr>
         <p:xfrm>
-          <a:off x="457200" y="1193800"/>
+          <a:off x="457200" y="1166099"/>
           <a:ext cx="8229600" cy="3390900"/>
         </p:xfrm>
         <a:graphic>
@@ -18430,11 +18430,11 @@
                 <a:tableStyleId>{5C22544A-7EE6-4342-B048-85BDC9FD1C3A}</a:tableStyleId>
               </a:tblPr>
               <a:tblGrid>
-                <a:gridCol w="1638300"/>
-                <a:gridCol w="1638300"/>
-                <a:gridCol w="1638300"/>
-                <a:gridCol w="1638300"/>
-                <a:gridCol w="1638300"/>
+                <a:gridCol w="1645920"/>
+                <a:gridCol w="1645920"/>
+                <a:gridCol w="1645920"/>
+                <a:gridCol w="1645920"/>
+                <a:gridCol w="1645920"/>
               </a:tblGrid>
               <a:tr h="0">
                 <a:tc>
@@ -18816,7 +18816,7 @@
           </p:nvPr>
         </p:nvGraphicFramePr>
         <p:xfrm>
-          <a:off x="457200" y="1193800"/>
+          <a:off x="457200" y="1166099"/>
           <a:ext cx="8229600" cy="3390900"/>
         </p:xfrm>
         <a:graphic>
@@ -18826,11 +18826,11 @@
                 <a:tableStyleId>{5C22544A-7EE6-4342-B048-85BDC9FD1C3A}</a:tableStyleId>
               </a:tblPr>
               <a:tblGrid>
-                <a:gridCol w="1638300"/>
-                <a:gridCol w="1638300"/>
-                <a:gridCol w="1638300"/>
-                <a:gridCol w="1638300"/>
-                <a:gridCol w="1638300"/>
+                <a:gridCol w="1645920"/>
+                <a:gridCol w="1645920"/>
+                <a:gridCol w="1645920"/>
+                <a:gridCol w="1645920"/>
+                <a:gridCol w="1645920"/>
               </a:tblGrid>
               <a:tr h="0">
                 <a:tc>
@@ -19725,8 +19725,8 @@
         </p:blipFill>
         <p:spPr bwMode="auto">
           <a:xfrm>
-            <a:off x="457200" y="2420739"/>
-            <a:ext cx="8229600" cy="850900"/>
+            <a:off x="457200" y="2458839"/>
+            <a:ext cx="8229599" cy="774700"/>
           </a:xfrm>
           <a:prstGeom prst="rect">
             <a:avLst/>

--- a/Lessons/09_neural_networks/Slides/neural_networks_slides.pptx
+++ b/Lessons/09_neural_networks/Slides/neural_networks_slides.pptx
@@ -13333,8 +13333,8 @@
         </p:blipFill>
         <p:spPr bwMode="auto">
           <a:xfrm>
-            <a:off x="457200" y="2535039"/>
-            <a:ext cx="8229600" cy="622300"/>
+            <a:off x="457200" y="2541389"/>
+            <a:ext cx="8229600" cy="609600"/>
           </a:xfrm>
           <a:prstGeom prst="rect">
             <a:avLst/>
@@ -13415,8 +13415,8 @@
         </p:blipFill>
         <p:spPr bwMode="auto">
           <a:xfrm>
-            <a:off x="457200" y="2528689"/>
-            <a:ext cx="8229600" cy="635000"/>
+            <a:off x="457200" y="2535039"/>
+            <a:ext cx="8229600" cy="622300"/>
           </a:xfrm>
           <a:prstGeom prst="rect">
             <a:avLst/>
@@ -14022,8 +14022,8 @@
         </p:blipFill>
         <p:spPr bwMode="auto">
           <a:xfrm>
-            <a:off x="457200" y="2236589"/>
-            <a:ext cx="8229600" cy="1219200"/>
+            <a:off x="457200" y="2242939"/>
+            <a:ext cx="8229600" cy="1206500"/>
           </a:xfrm>
           <a:prstGeom prst="rect">
             <a:avLst/>
@@ -14516,8 +14516,8 @@
         </p:blipFill>
         <p:spPr bwMode="auto">
           <a:xfrm>
-            <a:off x="2021008" y="2361973"/>
-            <a:ext cx="5101983" cy="968432"/>
+            <a:off x="2068052" y="2351582"/>
+            <a:ext cx="5007895" cy="989214"/>
           </a:xfrm>
           <a:prstGeom prst="rect">
             <a:avLst/>
@@ -14816,8 +14816,8 @@
         </p:blipFill>
         <p:spPr bwMode="auto">
           <a:xfrm>
-            <a:off x="457200" y="2452489"/>
-            <a:ext cx="8229600" cy="787400"/>
+            <a:off x="457200" y="2465189"/>
+            <a:ext cx="8229600" cy="762000"/>
           </a:xfrm>
           <a:prstGeom prst="rect">
             <a:avLst/>
@@ -15535,8 +15535,8 @@
         </p:blipFill>
         <p:spPr bwMode="auto">
           <a:xfrm>
-            <a:off x="1307167" y="1813333"/>
-            <a:ext cx="6529665" cy="2065712"/>
+            <a:off x="1342506" y="1769691"/>
+            <a:ext cx="6458988" cy="2152996"/>
           </a:xfrm>
           <a:prstGeom prst="rect">
             <a:avLst/>
@@ -19725,8 +19725,8 @@
         </p:blipFill>
         <p:spPr bwMode="auto">
           <a:xfrm>
-            <a:off x="457200" y="2458839"/>
-            <a:ext cx="8229599" cy="774700"/>
+            <a:off x="457200" y="2439789"/>
+            <a:ext cx="8229600" cy="812800"/>
           </a:xfrm>
           <a:prstGeom prst="rect">
             <a:avLst/>

--- a/Lessons/09_neural_networks/Slides/neural_networks_slides.pptx
+++ b/Lessons/09_neural_networks/Slides/neural_networks_slides.pptx
@@ -693,6 +693,20 @@
         <p:txBody>
           <a:bodyPr/>
           <a:lstStyle/>
+          <a:p>
+            <a:pPr lvl="0" indent="0" marL="0">
+              <a:buNone/>
+            </a:pPr>
+            <a:r>
+              <a:rPr/>
+              <a:t>The middle step is gone from the slide to keep the type readable: 1.25 squared over two is 0.78125, and that is the exponent. Do it out loud.</a:t>
+            </a:r>
+          </a:p>
+          <a:p>
+            <a:pPr lvl="0" indent="0" marL="0">
+              <a:buNone/>
+            </a:pPr>
+          </a:p>
           <a:p>
             <a:pPr lvl="0" indent="0" marL="0">
               <a:buNone/>
@@ -11333,7 +11347,7 @@
       </p:sp>
       <p:pic>
         <p:nvPicPr>
-          <p:cNvPr descr="eq_41bc9429f3.png" id="0" name="Picture 1"/>
+          <p:cNvPr descr="eq_e163dd354e.png" id="0" name="Picture 1"/>
           <p:cNvPicPr>
             <a:picLocks noGrp="1" noChangeAspect="1"/>
           </p:cNvPicPr>
@@ -11347,8 +11361,8 @@
         </p:blipFill>
         <p:spPr bwMode="auto">
           <a:xfrm>
-            <a:off x="457200" y="2611239"/>
-            <a:ext cx="8229599" cy="469900"/>
+            <a:off x="457200" y="2547739"/>
+            <a:ext cx="8229600" cy="596900"/>
           </a:xfrm>
           <a:prstGeom prst="rect">
             <a:avLst/>
